--- a/Aula07_Generalizacao/Aula07_Teoria.pptx
+++ b/Aula07_Generalizacao/Aula07_Teoria.pptx
@@ -2320,6 +2320,10 @@
           </a:solidFill>
           <a:ln/>
         </p:spPr>
+        <p:txBody>
+          <a:bodyPr/>
+          <a:p/>
+        </p:txBody>
       </p:sp>
       <p:sp>
         <p:nvSpPr>
@@ -2342,6 +2346,10 @@
           </a:solidFill>
           <a:ln/>
         </p:spPr>
+        <p:txBody>
+          <a:bodyPr/>
+          <a:p/>
+        </p:txBody>
       </p:sp>
       <p:sp>
         <p:nvSpPr>
@@ -2362,6 +2370,10 @@
           </a:solidFill>
           <a:ln/>
         </p:spPr>
+        <p:txBody>
+          <a:bodyPr/>
+          <a:p/>
+        </p:txBody>
       </p:sp>
       <p:pic>
         <p:nvPicPr>
@@ -2633,6 +2645,10 @@
           </a:solidFill>
           <a:ln/>
         </p:spPr>
+        <p:txBody>
+          <a:bodyPr/>
+          <a:p/>
+        </p:txBody>
       </p:sp>
       <p:sp>
         <p:nvSpPr>
@@ -2733,6 +2749,10 @@
           </a:solidFill>
           <a:ln/>
         </p:spPr>
+        <p:txBody>
+          <a:bodyPr/>
+          <a:p/>
+        </p:txBody>
       </p:sp>
       <p:sp>
         <p:nvSpPr>
@@ -2879,6 +2899,10 @@
           </a:solidFill>
           <a:ln/>
         </p:spPr>
+        <p:txBody>
+          <a:bodyPr/>
+          <a:p/>
+        </p:txBody>
       </p:sp>
       <p:sp>
         <p:nvSpPr>
@@ -3365,6 +3389,10 @@
           </a:solidFill>
           <a:ln/>
         </p:spPr>
+        <p:txBody>
+          <a:bodyPr/>
+          <a:p/>
+        </p:txBody>
       </p:sp>
       <p:sp>
         <p:nvSpPr>
@@ -3463,7 +3491,7 @@
                 <a:ea typeface="Calibri" pitchFamily="34" charset="-122"/>
                 <a:cs typeface="Calibri" pitchFamily="34" charset="-120"/>
               </a:rPr>
-              <a:t>Wessels: transnumeração torna dados interpretáveis em nova forma.</a:t>
+              <a:t>Transnumeração torna dados interpretáveis em nova forma.</a:t>
             </a:r>
             <a:endParaRPr lang="en-US" sz="1250" dirty="0"/>
           </a:p>
@@ -3484,7 +3512,7 @@
                 <a:ea typeface="Calibri" pitchFamily="34" charset="-122"/>
                 <a:cs typeface="Calibri" pitchFamily="34" charset="-120"/>
               </a:rPr>
-              <a:t>Queiroz: múltiplas expressões exibem aspectos distintos do mesmo conceito.</a:t>
+              <a:t>Múltiplas expressões exibem aspectos distintos do mesmo conceito.</a:t>
             </a:r>
             <a:endParaRPr lang="en-US" sz="1250" dirty="0"/>
           </a:p>
@@ -3505,7 +3533,7 @@
                 <a:ea typeface="Calibri" pitchFamily="34" charset="-122"/>
                 <a:cs typeface="Calibri" pitchFamily="34" charset="-120"/>
               </a:rPr>
-              <a:t>Relato: articular código, texto, tabela, gráfico e interpretação.</a:t>
+              <a:t>Articular código, texto, tabela, gráfico e interpretação.</a:t>
             </a:r>
             <a:endParaRPr lang="en-US" sz="1250" dirty="0"/>
           </a:p>
@@ -3532,6 +3560,10 @@
           </a:solidFill>
           <a:ln/>
         </p:spPr>
+        <p:txBody>
+          <a:bodyPr/>
+          <a:p/>
+        </p:txBody>
       </p:sp>
       <p:sp>
         <p:nvSpPr>
@@ -3799,6 +3831,10 @@
           </a:solidFill>
           <a:ln/>
         </p:spPr>
+        <p:txBody>
+          <a:bodyPr/>
+          <a:p/>
+        </p:txBody>
       </p:sp>
       <p:sp>
         <p:nvSpPr>
@@ -3899,6 +3935,10 @@
           </a:solidFill>
           <a:ln/>
         </p:spPr>
+        <p:txBody>
+          <a:bodyPr/>
+          <a:p/>
+        </p:txBody>
       </p:sp>
       <p:sp>
         <p:nvSpPr>
@@ -4045,6 +4085,10 @@
           </a:solidFill>
           <a:ln/>
         </p:spPr>
+        <p:txBody>
+          <a:bodyPr/>
+          <a:p/>
+        </p:txBody>
       </p:sp>
       <p:sp>
         <p:nvSpPr>
@@ -4718,6 +4762,10 @@
           </a:solidFill>
           <a:ln/>
         </p:spPr>
+        <p:txBody>
+          <a:bodyPr/>
+          <a:p/>
+        </p:txBody>
       </p:sp>
       <p:sp>
         <p:nvSpPr>
@@ -4816,7 +4864,7 @@
                 <a:ea typeface="Calibri" pitchFamily="34" charset="-122"/>
                 <a:cs typeface="Calibri" pitchFamily="34" charset="-120"/>
               </a:rPr>
-              <a:t>Wessels: múltiplas representações indicam modelagem mais bem-sucedida.</a:t>
+              <a:t>Múltiplas representações indicam modelagem mais bem-sucedida.</a:t>
             </a:r>
             <a:endParaRPr lang="en-US" sz="1250" dirty="0"/>
           </a:p>
@@ -4837,7 +4885,7 @@
                 <a:ea typeface="Calibri" pitchFamily="34" charset="-122"/>
                 <a:cs typeface="Calibri" pitchFamily="34" charset="-120"/>
               </a:rPr>
-              <a:t>Queiroz: a análise qualitativa observa invariantes e relações mobilizadas na ação.</a:t>
+              <a:t>A análise qualitativa observa invariantes e relações mobilizadas na ação.</a:t>
             </a:r>
             <a:endParaRPr lang="en-US" sz="1250" dirty="0"/>
           </a:p>
@@ -4858,7 +4906,7 @@
                 <a:ea typeface="Calibri" pitchFamily="34" charset="-122"/>
                 <a:cs typeface="Calibri" pitchFamily="34" charset="-120"/>
               </a:rPr>
-              <a:t>Relato: solicitar explicação do raciocínio desenvolvido.</a:t>
+              <a:t>Solicitar explicação do raciocínio desenvolvido.</a:t>
             </a:r>
             <a:endParaRPr lang="en-US" sz="1250" dirty="0"/>
           </a:p>
@@ -4885,6 +4933,10 @@
           </a:solidFill>
           <a:ln/>
         </p:spPr>
+        <p:txBody>
+          <a:bodyPr/>
+          <a:p/>
+        </p:txBody>
       </p:sp>
       <p:sp>
         <p:nvSpPr>
@@ -5152,6 +5204,10 @@
           </a:solidFill>
           <a:ln/>
         </p:spPr>
+        <p:txBody>
+          <a:bodyPr/>
+          <a:p/>
+        </p:txBody>
       </p:sp>
       <p:sp>
         <p:nvSpPr>
@@ -5252,6 +5308,10 @@
           </a:solidFill>
           <a:ln/>
         </p:spPr>
+        <p:txBody>
+          <a:bodyPr/>
+          <a:p/>
+        </p:txBody>
       </p:sp>
       <p:sp>
         <p:nvSpPr>
@@ -5398,6 +5458,10 @@
           </a:solidFill>
           <a:ln/>
         </p:spPr>
+        <p:txBody>
+          <a:bodyPr/>
+          <a:p/>
+        </p:txBody>
       </p:sp>
       <p:sp>
         <p:nvSpPr>
@@ -5901,6 +5965,10 @@
           </a:solidFill>
           <a:ln/>
         </p:spPr>
+        <p:txBody>
+          <a:bodyPr/>
+          <a:p/>
+        </p:txBody>
       </p:sp>
       <p:sp>
         <p:nvSpPr>
@@ -5999,7 +6067,7 @@
                 <a:ea typeface="Calibri" pitchFamily="34" charset="-122"/>
                 <a:cs typeface="Calibri" pitchFamily="34" charset="-120"/>
               </a:rPr>
-              <a:t>Queiroz: o resultado final não esgota a aprendizagem do conceito.</a:t>
+              <a:t>O resultado final não esgota a aprendizagem do conceito.</a:t>
             </a:r>
             <a:endParaRPr lang="en-US" sz="1250" dirty="0"/>
           </a:p>
@@ -6020,7 +6088,7 @@
                 <a:ea typeface="Calibri" pitchFamily="34" charset="-122"/>
                 <a:cs typeface="Calibri" pitchFamily="34" charset="-120"/>
               </a:rPr>
-              <a:t>Relato: reconhecer limites da ferramenta e do modelo.</a:t>
+              <a:t>Reconhecer limites da ferramenta e do modelo.</a:t>
             </a:r>
             <a:endParaRPr lang="en-US" sz="1250" dirty="0"/>
           </a:p>
@@ -6041,7 +6109,7 @@
                 <a:ea typeface="Calibri" pitchFamily="34" charset="-122"/>
                 <a:cs typeface="Calibri" pitchFamily="34" charset="-120"/>
               </a:rPr>
-              <a:t>Wessels: o contexto e o tipo de dado influenciam a representação escolhida.</a:t>
+              <a:t>O contexto e o tipo de dado influenciam a representação escolhida.</a:t>
             </a:r>
             <a:endParaRPr lang="en-US" sz="1250" dirty="0"/>
           </a:p>
@@ -6068,6 +6136,10 @@
           </a:solidFill>
           <a:ln/>
         </p:spPr>
+        <p:txBody>
+          <a:bodyPr/>
+          <a:p/>
+        </p:txBody>
       </p:sp>
       <p:sp>
         <p:nvSpPr>
@@ -6335,6 +6407,10 @@
           </a:solidFill>
           <a:ln/>
         </p:spPr>
+        <p:txBody>
+          <a:bodyPr/>
+          <a:p/>
+        </p:txBody>
       </p:sp>
       <p:sp>
         <p:nvSpPr>
@@ -6435,6 +6511,10 @@
           </a:solidFill>
           <a:ln/>
         </p:spPr>
+        <p:txBody>
+          <a:bodyPr/>
+          <a:p/>
+        </p:txBody>
       </p:sp>
       <p:sp>
         <p:nvSpPr>
@@ -6581,6 +6661,10 @@
           </a:solidFill>
           <a:ln/>
         </p:spPr>
+        <p:txBody>
+          <a:bodyPr/>
+          <a:p/>
+        </p:txBody>
       </p:sp>
       <p:sp>
         <p:nvSpPr>
@@ -7135,6 +7219,10 @@
           </a:solidFill>
           <a:ln/>
         </p:spPr>
+        <p:txBody>
+          <a:bodyPr/>
+          <a:p/>
+        </p:txBody>
       </p:sp>
       <p:sp>
         <p:nvSpPr>
@@ -7233,7 +7321,7 @@
                 <a:ea typeface="Calibri" pitchFamily="34" charset="-122"/>
                 <a:cs typeface="Calibri" pitchFamily="34" charset="-120"/>
               </a:rPr>
-              <a:t>Relato: incluir revisão, depuração e reconstrução.</a:t>
+              <a:t>Incluir revisão, depuração e reconstrução.</a:t>
             </a:r>
             <a:endParaRPr lang="en-US" sz="1250" dirty="0"/>
           </a:p>
@@ -7254,7 +7342,7 @@
                 <a:ea typeface="Calibri" pitchFamily="34" charset="-122"/>
                 <a:cs typeface="Calibri" pitchFamily="34" charset="-120"/>
               </a:rPr>
-              <a:t>Queiroz: a tarefa deve articular dimensão material e cognitiva.</a:t>
+              <a:t>A tarefa deve articular dimensão material e cognitiva.</a:t>
             </a:r>
             <a:endParaRPr lang="en-US" sz="1250" dirty="0"/>
           </a:p>
@@ -7275,7 +7363,7 @@
                 <a:ea typeface="Calibri" pitchFamily="34" charset="-122"/>
                 <a:cs typeface="Calibri" pitchFamily="34" charset="-120"/>
               </a:rPr>
-              <a:t>Wessels: níveis SOLO ajudam a observar respostas de menor a maior integração.</a:t>
+              <a:t>Níveis SOLO ajudam a observar respostas de menor a maior integração.</a:t>
             </a:r>
             <a:endParaRPr lang="en-US" sz="1250" dirty="0"/>
           </a:p>
@@ -7302,6 +7390,10 @@
           </a:solidFill>
           <a:ln/>
         </p:spPr>
+        <p:txBody>
+          <a:bodyPr/>
+          <a:p/>
+        </p:txBody>
       </p:sp>
       <p:sp>
         <p:nvSpPr>
@@ -7569,6 +7661,10 @@
           </a:solidFill>
           <a:ln/>
         </p:spPr>
+        <p:txBody>
+          <a:bodyPr/>
+          <a:p/>
+        </p:txBody>
       </p:sp>
       <p:sp>
         <p:nvSpPr>
@@ -7669,6 +7765,10 @@
           </a:solidFill>
           <a:ln/>
         </p:spPr>
+        <p:txBody>
+          <a:bodyPr/>
+          <a:p/>
+        </p:txBody>
       </p:sp>
       <p:sp>
         <p:nvSpPr>
@@ -7815,6 +7915,10 @@
           </a:solidFill>
           <a:ln/>
         </p:spPr>
+        <p:txBody>
+          <a:bodyPr/>
+          <a:p/>
+        </p:txBody>
       </p:sp>
       <p:sp>
         <p:nvSpPr>
@@ -8029,6 +8133,10 @@
           </a:solidFill>
           <a:ln/>
         </p:spPr>
+        <p:txBody>
+          <a:bodyPr/>
+          <a:p/>
+        </p:txBody>
       </p:sp>
       <p:sp>
         <p:nvSpPr>
@@ -8127,7 +8235,7 @@
                 <a:ea typeface="Calibri" pitchFamily="34" charset="-122"/>
                 <a:cs typeface="Calibri" pitchFamily="34" charset="-120"/>
               </a:rPr>
-              <a:t>Relato: reconhecer limites da ferramenta e do modelo.</a:t>
+              <a:t>Reconhecer limites da ferramenta e do modelo.</a:t>
             </a:r>
             <a:endParaRPr lang="en-US" sz="1250" dirty="0"/>
           </a:p>
@@ -8148,7 +8256,7 @@
                 <a:ea typeface="Calibri" pitchFamily="34" charset="-122"/>
                 <a:cs typeface="Calibri" pitchFamily="34" charset="-120"/>
               </a:rPr>
-              <a:t>Queiroz: a forma de representação influencia erros, antecipações e reorganizações.</a:t>
+              <a:t>A forma de representação influencia erros, antecipações e reorganizações.</a:t>
             </a:r>
             <a:endParaRPr lang="en-US" sz="1250" dirty="0"/>
           </a:p>
@@ -8169,7 +8277,7 @@
                 <a:ea typeface="Calibri" pitchFamily="34" charset="-122"/>
                 <a:cs typeface="Calibri" pitchFamily="34" charset="-120"/>
               </a:rPr>
-              <a:t>Wessels: respostas idiossincráticas também revelam modos de pensar.</a:t>
+              <a:t>Respostas idiossincráticas também revelam modos de pensar.</a:t>
             </a:r>
             <a:endParaRPr lang="en-US" sz="1250" dirty="0"/>
           </a:p>
@@ -8196,6 +8304,10 @@
           </a:solidFill>
           <a:ln/>
         </p:spPr>
+        <p:txBody>
+          <a:bodyPr/>
+          <a:p/>
+        </p:txBody>
       </p:sp>
       <p:sp>
         <p:nvSpPr>
@@ -8463,6 +8575,10 @@
           </a:solidFill>
           <a:ln/>
         </p:spPr>
+        <p:txBody>
+          <a:bodyPr/>
+          <a:p/>
+        </p:txBody>
       </p:sp>
       <p:sp>
         <p:nvSpPr>
@@ -8563,6 +8679,10 @@
           </a:solidFill>
           <a:ln/>
         </p:spPr>
+        <p:txBody>
+          <a:bodyPr/>
+          <a:p/>
+        </p:txBody>
       </p:sp>
       <p:sp>
         <p:nvSpPr>
@@ -8709,6 +8829,10 @@
           </a:solidFill>
           <a:ln/>
         </p:spPr>
+        <p:txBody>
+          <a:bodyPr/>
+          <a:p/>
+        </p:txBody>
       </p:sp>
       <p:sp>
         <p:nvSpPr>
@@ -8866,6 +8990,10 @@
           </a:solidFill>
           <a:ln/>
         </p:spPr>
+        <p:txBody>
+          <a:bodyPr/>
+          <a:p/>
+        </p:txBody>
       </p:sp>
       <p:sp>
         <p:nvSpPr>
@@ -8964,7 +9092,7 @@
                 <a:ea typeface="Calibri" pitchFamily="34" charset="-122"/>
                 <a:cs typeface="Calibri" pitchFamily="34" charset="-120"/>
               </a:rPr>
-              <a:t>Queiroz: múltiplas expressões exibem aspectos distintos do mesmo conceito.</a:t>
+              <a:t>Múltiplas expressões exibem aspectos distintos do mesmo conceito.</a:t>
             </a:r>
             <a:endParaRPr lang="en-US" sz="1250" dirty="0"/>
           </a:p>
@@ -8985,7 +9113,7 @@
                 <a:ea typeface="Calibri" pitchFamily="34" charset="-122"/>
                 <a:cs typeface="Calibri" pitchFamily="34" charset="-120"/>
               </a:rPr>
-              <a:t>Relato: solicitar explicação do raciocínio desenvolvido.</a:t>
+              <a:t>Solicitar explicação do raciocínio desenvolvido.</a:t>
             </a:r>
             <a:endParaRPr lang="en-US" sz="1250" dirty="0"/>
           </a:p>
@@ -9006,7 +9134,7 @@
                 <a:ea typeface="Calibri" pitchFamily="34" charset="-122"/>
                 <a:cs typeface="Calibri" pitchFamily="34" charset="-120"/>
               </a:rPr>
-              <a:t>Wessels: atividades planejadas desenvolvem representação e pensamento de ordem superior.</a:t>
+              <a:t>Atividades planejadas desenvolvem representação e pensamento de ordem superior.</a:t>
             </a:r>
             <a:endParaRPr lang="en-US" sz="1250" dirty="0"/>
           </a:p>
@@ -9033,6 +9161,10 @@
           </a:solidFill>
           <a:ln/>
         </p:spPr>
+        <p:txBody>
+          <a:bodyPr/>
+          <a:p/>
+        </p:txBody>
       </p:sp>
       <p:sp>
         <p:nvSpPr>
@@ -9300,6 +9432,10 @@
           </a:solidFill>
           <a:ln/>
         </p:spPr>
+        <p:txBody>
+          <a:bodyPr/>
+          <a:p/>
+        </p:txBody>
       </p:sp>
       <p:sp>
         <p:nvSpPr>
@@ -9400,6 +9536,10 @@
           </a:solidFill>
           <a:ln/>
         </p:spPr>
+        <p:txBody>
+          <a:bodyPr/>
+          <a:p/>
+        </p:txBody>
       </p:sp>
       <p:sp>
         <p:nvSpPr>
@@ -9546,6 +9686,10 @@
           </a:solidFill>
           <a:ln/>
         </p:spPr>
+        <p:txBody>
+          <a:bodyPr/>
+          <a:p/>
+        </p:txBody>
       </p:sp>
       <p:sp>
         <p:nvSpPr>
@@ -9941,6 +10085,10 @@
           </a:solidFill>
           <a:ln/>
         </p:spPr>
+        <p:txBody>
+          <a:bodyPr/>
+          <a:p/>
+        </p:txBody>
       </p:sp>
       <p:sp>
         <p:nvSpPr>
@@ -10039,7 +10187,7 @@
                 <a:ea typeface="Calibri" pitchFamily="34" charset="-122"/>
                 <a:cs typeface="Calibri" pitchFamily="34" charset="-120"/>
               </a:rPr>
-              <a:t>Wessels: níveis SOLO ajudam a observar respostas de menor a maior integração.</a:t>
+              <a:t>Níveis SOLO ajudam a observar respostas de menor a maior integração.</a:t>
             </a:r>
             <a:endParaRPr lang="en-US" sz="1250" dirty="0"/>
           </a:p>
@@ -10060,7 +10208,7 @@
                 <a:ea typeface="Calibri" pitchFamily="34" charset="-122"/>
                 <a:cs typeface="Calibri" pitchFamily="34" charset="-120"/>
               </a:rPr>
-              <a:t>Queiroz: o percurso da tarefa revela mudanças no discurso e na ação.</a:t>
+              <a:t>O percurso da tarefa revela mudanças no discurso e na ação.</a:t>
             </a:r>
             <a:endParaRPr lang="en-US" sz="1250" dirty="0"/>
           </a:p>
@@ -10081,7 +10229,7 @@
                 <a:ea typeface="Calibri" pitchFamily="34" charset="-122"/>
                 <a:cs typeface="Calibri" pitchFamily="34" charset="-120"/>
               </a:rPr>
-              <a:t>Relato: avaliar o percurso de pensamento, não apenas o código final.</a:t>
+              <a:t>Avaliar o percurso de pensamento, não apenas o código final.</a:t>
             </a:r>
             <a:endParaRPr lang="en-US" sz="1250" dirty="0"/>
           </a:p>
@@ -10108,6 +10256,10 @@
           </a:solidFill>
           <a:ln/>
         </p:spPr>
+        <p:txBody>
+          <a:bodyPr/>
+          <a:p/>
+        </p:txBody>
       </p:sp>
       <p:sp>
         <p:nvSpPr>
@@ -10416,6 +10568,10 @@
           </a:solidFill>
           <a:ln/>
         </p:spPr>
+        <p:txBody>
+          <a:bodyPr/>
+          <a:p/>
+        </p:txBody>
       </p:sp>
       <p:sp>
         <p:nvSpPr>
@@ -10523,6 +10679,10 @@
           </a:solidFill>
           <a:ln/>
         </p:spPr>
+        <p:txBody>
+          <a:bodyPr/>
+          <a:p/>
+        </p:txBody>
       </p:sp>
       <p:sp>
         <p:nvSpPr>
@@ -10543,6 +10703,10 @@
           </a:solidFill>
           <a:ln/>
         </p:spPr>
+        <p:txBody>
+          <a:bodyPr/>
+          <a:p/>
+        </p:txBody>
       </p:sp>
       <p:pic>
         <p:nvPicPr>
@@ -10855,6 +11019,10 @@
           </a:solidFill>
           <a:ln/>
         </p:spPr>
+        <p:txBody>
+          <a:bodyPr/>
+          <a:p/>
+        </p:txBody>
       </p:sp>
       <p:sp>
         <p:nvSpPr>
@@ -10875,6 +11043,10 @@
           </a:solidFill>
           <a:ln/>
         </p:spPr>
+        <p:txBody>
+          <a:bodyPr/>
+          <a:p/>
+        </p:txBody>
       </p:sp>
       <p:sp>
         <p:nvSpPr>
@@ -10978,6 +11150,10 @@
           </a:solidFill>
           <a:ln/>
         </p:spPr>
+        <p:txBody>
+          <a:bodyPr/>
+          <a:p/>
+        </p:txBody>
       </p:sp>
       <p:sp>
         <p:nvSpPr>
@@ -10998,6 +11174,10 @@
           </a:solidFill>
           <a:ln/>
         </p:spPr>
+        <p:txBody>
+          <a:bodyPr/>
+          <a:p/>
+        </p:txBody>
       </p:sp>
       <p:sp>
         <p:nvSpPr>
@@ -11101,6 +11281,10 @@
           </a:solidFill>
           <a:ln/>
         </p:spPr>
+        <p:txBody>
+          <a:bodyPr/>
+          <a:p/>
+        </p:txBody>
       </p:sp>
       <p:sp>
         <p:nvSpPr>
@@ -11121,6 +11305,10 @@
           </a:solidFill>
           <a:ln/>
         </p:spPr>
+        <p:txBody>
+          <a:bodyPr/>
+          <a:p/>
+        </p:txBody>
       </p:sp>
       <p:sp>
         <p:nvSpPr>
@@ -11224,6 +11412,10 @@
           </a:solidFill>
           <a:ln/>
         </p:spPr>
+        <p:txBody>
+          <a:bodyPr/>
+          <a:p/>
+        </p:txBody>
       </p:sp>
       <p:sp>
         <p:nvSpPr>
@@ -11244,6 +11436,10 @@
           </a:solidFill>
           <a:ln/>
         </p:spPr>
+        <p:txBody>
+          <a:bodyPr/>
+          <a:p/>
+        </p:txBody>
       </p:sp>
       <p:sp>
         <p:nvSpPr>
@@ -11347,6 +11543,10 @@
           </a:solidFill>
           <a:ln/>
         </p:spPr>
+        <p:txBody>
+          <a:bodyPr/>
+          <a:p/>
+        </p:txBody>
       </p:sp>
       <p:sp>
         <p:nvSpPr>
@@ -11367,6 +11567,10 @@
           </a:solidFill>
           <a:ln/>
         </p:spPr>
+        <p:txBody>
+          <a:bodyPr/>
+          <a:p/>
+        </p:txBody>
       </p:sp>
       <p:sp>
         <p:nvSpPr>
@@ -11470,6 +11674,10 @@
           </a:solidFill>
           <a:ln/>
         </p:spPr>
+        <p:txBody>
+          <a:bodyPr/>
+          <a:p/>
+        </p:txBody>
       </p:sp>
       <p:sp>
         <p:nvSpPr>
@@ -11490,6 +11698,10 @@
           </a:solidFill>
           <a:ln/>
         </p:spPr>
+        <p:txBody>
+          <a:bodyPr/>
+          <a:p/>
+        </p:txBody>
       </p:sp>
       <p:sp>
         <p:nvSpPr>
@@ -11820,6 +12032,10 @@
           </a:solidFill>
           <a:ln/>
         </p:spPr>
+        <p:txBody>
+          <a:bodyPr/>
+          <a:p/>
+        </p:txBody>
       </p:sp>
       <p:sp>
         <p:nvSpPr>
@@ -11840,6 +12056,10 @@
           </a:solidFill>
           <a:ln/>
         </p:spPr>
+        <p:txBody>
+          <a:bodyPr/>
+          <a:p/>
+        </p:txBody>
       </p:sp>
       <p:sp>
         <p:nvSpPr>
@@ -12004,6 +12224,10 @@
           </a:solidFill>
           <a:ln/>
         </p:spPr>
+        <p:txBody>
+          <a:bodyPr/>
+          <a:p/>
+        </p:txBody>
       </p:sp>
       <p:sp>
         <p:nvSpPr>
@@ -12024,6 +12248,10 @@
           </a:solidFill>
           <a:ln/>
         </p:spPr>
+        <p:txBody>
+          <a:bodyPr/>
+          <a:p/>
+        </p:txBody>
       </p:sp>
       <p:sp>
         <p:nvSpPr>
@@ -12188,6 +12416,10 @@
           </a:solidFill>
           <a:ln/>
         </p:spPr>
+        <p:txBody>
+          <a:bodyPr/>
+          <a:p/>
+        </p:txBody>
       </p:sp>
       <p:sp>
         <p:nvSpPr>
@@ -12437,6 +12669,10 @@
           </a:solidFill>
           <a:ln/>
         </p:spPr>
+        <p:txBody>
+          <a:bodyPr/>
+          <a:p/>
+        </p:txBody>
       </p:sp>
       <p:sp>
         <p:nvSpPr>
@@ -12457,6 +12693,10 @@
           </a:solidFill>
           <a:ln/>
         </p:spPr>
+        <p:txBody>
+          <a:bodyPr/>
+          <a:p/>
+        </p:txBody>
       </p:sp>
       <p:sp>
         <p:nvSpPr>
@@ -12621,6 +12861,10 @@
           </a:solidFill>
           <a:ln/>
         </p:spPr>
+        <p:txBody>
+          <a:bodyPr/>
+          <a:p/>
+        </p:txBody>
       </p:sp>
       <p:sp>
         <p:nvSpPr>
@@ -12641,6 +12885,10 @@
           </a:solidFill>
           <a:ln/>
         </p:spPr>
+        <p:txBody>
+          <a:bodyPr/>
+          <a:p/>
+        </p:txBody>
       </p:sp>
       <p:sp>
         <p:nvSpPr>
@@ -12805,6 +13053,10 @@
           </a:solidFill>
           <a:ln/>
         </p:spPr>
+        <p:txBody>
+          <a:bodyPr/>
+          <a:p/>
+        </p:txBody>
       </p:sp>
       <p:sp>
         <p:nvSpPr>
@@ -13054,6 +13306,10 @@
           </a:solidFill>
           <a:ln/>
         </p:spPr>
+        <p:txBody>
+          <a:bodyPr/>
+          <a:p/>
+        </p:txBody>
       </p:sp>
       <p:sp>
         <p:nvSpPr>
@@ -13074,6 +13330,10 @@
           </a:solidFill>
           <a:ln/>
         </p:spPr>
+        <p:txBody>
+          <a:bodyPr/>
+          <a:p/>
+        </p:txBody>
       </p:sp>
       <p:sp>
         <p:nvSpPr>
@@ -13291,6 +13551,10 @@
           </a:solidFill>
           <a:ln/>
         </p:spPr>
+        <p:txBody>
+          <a:bodyPr/>
+          <a:p/>
+        </p:txBody>
       </p:sp>
       <p:sp>
         <p:nvSpPr>
@@ -13311,6 +13575,10 @@
           </a:solidFill>
           <a:ln/>
         </p:spPr>
+        <p:txBody>
+          <a:bodyPr/>
+          <a:p/>
+        </p:txBody>
       </p:sp>
       <p:sp>
         <p:nvSpPr>
@@ -13636,6 +13904,10 @@
           </a:solidFill>
           <a:ln/>
         </p:spPr>
+        <p:txBody>
+          <a:bodyPr/>
+          <a:p/>
+        </p:txBody>
       </p:sp>
       <p:sp>
         <p:nvSpPr>
@@ -13775,6 +14047,10 @@
           </a:solidFill>
           <a:ln/>
         </p:spPr>
+        <p:txBody>
+          <a:bodyPr/>
+          <a:p/>
+        </p:txBody>
       </p:sp>
       <p:sp>
         <p:nvSpPr>
@@ -14139,6 +14415,10 @@
           </a:solidFill>
           <a:ln/>
         </p:spPr>
+        <p:txBody>
+          <a:bodyPr/>
+          <a:p/>
+        </p:txBody>
       </p:sp>
       <p:sp>
         <p:nvSpPr>
@@ -14239,6 +14519,10 @@
           </a:solidFill>
           <a:ln/>
         </p:spPr>
+        <p:txBody>
+          <a:bodyPr/>
+          <a:p/>
+        </p:txBody>
       </p:sp>
       <p:sp>
         <p:nvSpPr>
@@ -14385,6 +14669,10 @@
           </a:solidFill>
           <a:ln/>
         </p:spPr>
+        <p:txBody>
+          <a:bodyPr/>
+          <a:p/>
+        </p:txBody>
       </p:sp>
       <p:sp>
         <p:nvSpPr>
@@ -14922,6 +15210,10 @@
           </a:solidFill>
           <a:ln/>
         </p:spPr>
+        <p:txBody>
+          <a:bodyPr/>
+          <a:p/>
+        </p:txBody>
       </p:sp>
       <p:sp>
         <p:nvSpPr>
@@ -15020,7 +15312,7 @@
                 <a:ea typeface="Calibri" pitchFamily="34" charset="-122"/>
                 <a:cs typeface="Calibri" pitchFamily="34" charset="-120"/>
               </a:rPr>
-              <a:t>Wessels: múltiplas representações indicam modelagem mais bem-sucedida.</a:t>
+              <a:t>Múltiplas representações indicam modelagem mais bem-sucedida.</a:t>
             </a:r>
             <a:endParaRPr lang="en-US" sz="1250" dirty="0"/>
           </a:p>
@@ -15041,7 +15333,7 @@
                 <a:ea typeface="Calibri" pitchFamily="34" charset="-122"/>
                 <a:cs typeface="Calibri" pitchFamily="34" charset="-120"/>
               </a:rPr>
-              <a:t>Queiroz: o resultado final não esgota a aprendizagem do conceito.</a:t>
+              <a:t>O resultado final não esgota a aprendizagem do conceito.</a:t>
             </a:r>
             <a:endParaRPr lang="en-US" sz="1250" dirty="0"/>
           </a:p>
@@ -15062,7 +15354,7 @@
                 <a:ea typeface="Calibri" pitchFamily="34" charset="-122"/>
                 <a:cs typeface="Calibri" pitchFamily="34" charset="-120"/>
               </a:rPr>
-              <a:t>Relato: avaliar o percurso de pensamento, não apenas o código final.</a:t>
+              <a:t>Avaliar o percurso de pensamento, não apenas o código final.</a:t>
             </a:r>
             <a:endParaRPr lang="en-US" sz="1250" dirty="0"/>
           </a:p>
@@ -15089,6 +15381,10 @@
           </a:solidFill>
           <a:ln/>
         </p:spPr>
+        <p:txBody>
+          <a:bodyPr/>
+          <a:p/>
+        </p:txBody>
       </p:sp>
       <p:sp>
         <p:nvSpPr>
@@ -15356,6 +15652,10 @@
           </a:solidFill>
           <a:ln/>
         </p:spPr>
+        <p:txBody>
+          <a:bodyPr/>
+          <a:p/>
+        </p:txBody>
       </p:sp>
       <p:sp>
         <p:nvSpPr>
@@ -15456,6 +15756,10 @@
           </a:solidFill>
           <a:ln/>
         </p:spPr>
+        <p:txBody>
+          <a:bodyPr/>
+          <a:p/>
+        </p:txBody>
       </p:sp>
       <p:sp>
         <p:nvSpPr>
@@ -15602,6 +15906,10 @@
           </a:solidFill>
           <a:ln/>
         </p:spPr>
+        <p:txBody>
+          <a:bodyPr/>
+          <a:p/>
+        </p:txBody>
       </p:sp>
       <p:sp>
         <p:nvSpPr>
@@ -16139,6 +16447,10 @@
           </a:solidFill>
           <a:ln/>
         </p:spPr>
+        <p:txBody>
+          <a:bodyPr/>
+          <a:p/>
+        </p:txBody>
       </p:sp>
       <p:sp>
         <p:nvSpPr>
@@ -16237,7 +16549,7 @@
                 <a:ea typeface="Calibri" pitchFamily="34" charset="-122"/>
                 <a:cs typeface="Calibri" pitchFamily="34" charset="-120"/>
               </a:rPr>
-              <a:t>Queiroz: representações ampliam a percepção de propriedades e relações.</a:t>
+              <a:t>Representações ampliam a percepção de propriedades e relações.</a:t>
             </a:r>
             <a:endParaRPr lang="en-US" sz="1250" dirty="0"/>
           </a:p>
@@ -16258,7 +16570,7 @@
                 <a:ea typeface="Calibri" pitchFamily="34" charset="-122"/>
                 <a:cs typeface="Calibri" pitchFamily="34" charset="-120"/>
               </a:rPr>
-              <a:t>Relato: avaliar o percurso de pensamento, não apenas o código final.</a:t>
+              <a:t>Avaliar o percurso de pensamento, não apenas o código final.</a:t>
             </a:r>
             <a:endParaRPr lang="en-US" sz="1250" dirty="0"/>
           </a:p>
@@ -16279,7 +16591,7 @@
                 <a:ea typeface="Calibri" pitchFamily="34" charset="-122"/>
                 <a:cs typeface="Calibri" pitchFamily="34" charset="-120"/>
               </a:rPr>
-              <a:t>Wessels: níveis SOLO ajudam a observar respostas de menor a maior integração.</a:t>
+              <a:t>Níveis SOLO ajudam a observar respostas de menor a maior integração.</a:t>
             </a:r>
             <a:endParaRPr lang="en-US" sz="1250" dirty="0"/>
           </a:p>
@@ -16306,6 +16618,10 @@
           </a:solidFill>
           <a:ln/>
         </p:spPr>
+        <p:txBody>
+          <a:bodyPr/>
+          <a:p/>
+        </p:txBody>
       </p:sp>
       <p:sp>
         <p:nvSpPr>
@@ -16573,6 +16889,10 @@
           </a:solidFill>
           <a:ln/>
         </p:spPr>
+        <p:txBody>
+          <a:bodyPr/>
+          <a:p/>
+        </p:txBody>
       </p:sp>
       <p:sp>
         <p:nvSpPr>
@@ -16673,6 +16993,10 @@
           </a:solidFill>
           <a:ln/>
         </p:spPr>
+        <p:txBody>
+          <a:bodyPr/>
+          <a:p/>
+        </p:txBody>
       </p:sp>
       <p:sp>
         <p:nvSpPr>
@@ -16819,6 +17143,10 @@
           </a:solidFill>
           <a:ln/>
         </p:spPr>
+        <p:txBody>
+          <a:bodyPr/>
+          <a:p/>
+        </p:txBody>
       </p:sp>
       <p:sp>
         <p:nvSpPr>
@@ -17441,6 +17769,10 @@
           </a:solidFill>
           <a:ln/>
         </p:spPr>
+        <p:txBody>
+          <a:bodyPr/>
+          <a:p/>
+        </p:txBody>
       </p:sp>
       <p:sp>
         <p:nvSpPr>
@@ -17539,7 +17871,7 @@
                 <a:ea typeface="Calibri" pitchFamily="34" charset="-122"/>
                 <a:cs typeface="Calibri" pitchFamily="34" charset="-120"/>
               </a:rPr>
-              <a:t>Relato: permitir manipulação de parâmetros e comparação de estados.</a:t>
+              <a:t>Permitir manipulação de parâmetros e comparação de estados.</a:t>
             </a:r>
             <a:endParaRPr lang="en-US" sz="1250" dirty="0"/>
           </a:p>
@@ -17560,7 +17892,7 @@
                 <a:ea typeface="Calibri" pitchFamily="34" charset="-122"/>
                 <a:cs typeface="Calibri" pitchFamily="34" charset="-120"/>
               </a:rPr>
-              <a:t>Queiroz: a interação consciente com a forma favorece reflexão conceitual.</a:t>
+              <a:t>A interação consciente com a forma favorece reflexão conceitual.</a:t>
             </a:r>
             <a:endParaRPr lang="en-US" sz="1250" dirty="0"/>
           </a:p>
@@ -17581,7 +17913,7 @@
                 <a:ea typeface="Calibri" pitchFamily="34" charset="-122"/>
                 <a:cs typeface="Calibri" pitchFamily="34" charset="-120"/>
               </a:rPr>
-              <a:t>Wessels: o contexto e o tipo de dado influenciam a representação escolhida.</a:t>
+              <a:t>O contexto e o tipo de dado influenciam a representação escolhida.</a:t>
             </a:r>
             <a:endParaRPr lang="en-US" sz="1250" dirty="0"/>
           </a:p>
@@ -17608,6 +17940,10 @@
           </a:solidFill>
           <a:ln/>
         </p:spPr>
+        <p:txBody>
+          <a:bodyPr/>
+          <a:p/>
+        </p:txBody>
       </p:sp>
       <p:sp>
         <p:nvSpPr>
